--- a/docs/startsup_figure.pptx
+++ b/docs/startsup_figure.pptx
@@ -138,344 +138,6 @@
 </p:cmAuthorLst>
 </file>
 
-<file path=ppt/revisionInfo.xml><?xml version="1.0" encoding="utf-8"?>
-<p1510:revInfo xmlns:a="http://schemas.openxmlformats.org/drawingml/2006/main" xmlns:r="http://schemas.openxmlformats.org/officeDocument/2006/relationships" xmlns:p1510="http://schemas.microsoft.com/office/powerpoint/2015/10/main">
-  <p1510:revLst>
-    <p1510:client id="{490D0536-0F69-4D83-BF7E-2DBCFE21E26A}" v="67" dt="2025-05-30T03:39:43.172"/>
-  </p1510:revLst>
-</p1510:revInfo>
-</file>
-
-<file path=ppt/changesInfos/changesInfo1.xml><?xml version="1.0" encoding="utf-8"?>
-<pc:chgInfo xmlns:a="http://schemas.openxmlformats.org/drawingml/2006/main" xmlns:r="http://schemas.openxmlformats.org/officeDocument/2006/relationships" xmlns:ac="http://schemas.microsoft.com/office/drawing/2013/main/command" xmlns:pc="http://schemas.microsoft.com/office/powerpoint/2013/main/command">
-  <pc:docChgLst>
-    <pc:chgData name="Quanming YAO" userId="4abab489-3045-406d-bbfe-969bcd5a84ea" providerId="ADAL" clId="{490D0536-0F69-4D83-BF7E-2DBCFE21E26A}"/>
-    <pc:docChg chg="undo custSel addSld delSld modSld modSection modNotesMaster">
-      <pc:chgData name="Quanming YAO" userId="4abab489-3045-406d-bbfe-969bcd5a84ea" providerId="ADAL" clId="{490D0536-0F69-4D83-BF7E-2DBCFE21E26A}" dt="2025-05-30T03:39:43.172" v="345"/>
-      <pc:docMkLst>
-        <pc:docMk/>
-      </pc:docMkLst>
-      <pc:sldChg chg="modSp mod">
-        <pc:chgData name="Quanming YAO" userId="4abab489-3045-406d-bbfe-969bcd5a84ea" providerId="ADAL" clId="{490D0536-0F69-4D83-BF7E-2DBCFE21E26A}" dt="2025-05-29T15:23:38.824" v="10" actId="20577"/>
-        <pc:sldMkLst>
-          <pc:docMk/>
-          <pc:sldMk cId="2793583594" sldId="256"/>
-        </pc:sldMkLst>
-        <pc:spChg chg="mod">
-          <ac:chgData name="Quanming YAO" userId="4abab489-3045-406d-bbfe-969bcd5a84ea" providerId="ADAL" clId="{490D0536-0F69-4D83-BF7E-2DBCFE21E26A}" dt="2025-05-29T15:23:38.824" v="10" actId="20577"/>
-          <ac:spMkLst>
-            <pc:docMk/>
-            <pc:sldMk cId="2793583594" sldId="256"/>
-            <ac:spMk id="3" creationId="{DE669075-FCE3-6BD7-02EF-080DEBED2845}"/>
-          </ac:spMkLst>
-        </pc:spChg>
-      </pc:sldChg>
-      <pc:sldChg chg="addSp delSp modSp mod modShow">
-        <pc:chgData name="Quanming YAO" userId="4abab489-3045-406d-bbfe-969bcd5a84ea" providerId="ADAL" clId="{490D0536-0F69-4D83-BF7E-2DBCFE21E26A}" dt="2025-05-29T15:56:11.300" v="301" actId="21"/>
-        <pc:sldMkLst>
-          <pc:docMk/>
-          <pc:sldMk cId="87713296" sldId="293"/>
-        </pc:sldMkLst>
-        <pc:spChg chg="del">
-          <ac:chgData name="Quanming YAO" userId="4abab489-3045-406d-bbfe-969bcd5a84ea" providerId="ADAL" clId="{490D0536-0F69-4D83-BF7E-2DBCFE21E26A}" dt="2025-05-29T15:41:34.010" v="49" actId="478"/>
-          <ac:spMkLst>
-            <pc:docMk/>
-            <pc:sldMk cId="87713296" sldId="293"/>
-            <ac:spMk id="3" creationId="{FAF28B9D-8070-E7BC-3C37-C39902AD90EF}"/>
-          </ac:spMkLst>
-        </pc:spChg>
-        <pc:spChg chg="del mod">
-          <ac:chgData name="Quanming YAO" userId="4abab489-3045-406d-bbfe-969bcd5a84ea" providerId="ADAL" clId="{490D0536-0F69-4D83-BF7E-2DBCFE21E26A}" dt="2025-05-29T15:56:11.300" v="301" actId="21"/>
-          <ac:spMkLst>
-            <pc:docMk/>
-            <pc:sldMk cId="87713296" sldId="293"/>
-            <ac:spMk id="8" creationId="{FE3438FA-8624-D55E-2116-B9FDA59F3E03}"/>
-          </ac:spMkLst>
-        </pc:spChg>
-        <pc:spChg chg="add mod">
-          <ac:chgData name="Quanming YAO" userId="4abab489-3045-406d-bbfe-969bcd5a84ea" providerId="ADAL" clId="{490D0536-0F69-4D83-BF7E-2DBCFE21E26A}" dt="2025-05-29T15:46:13.969" v="217" actId="1035"/>
-          <ac:spMkLst>
-            <pc:docMk/>
-            <pc:sldMk cId="87713296" sldId="293"/>
-            <ac:spMk id="12" creationId="{B2C0B725-5121-DF34-95D2-0636885DE176}"/>
-          </ac:spMkLst>
-        </pc:spChg>
-        <pc:graphicFrameChg chg="add mod modGraphic">
-          <ac:chgData name="Quanming YAO" userId="4abab489-3045-406d-bbfe-969bcd5a84ea" providerId="ADAL" clId="{490D0536-0F69-4D83-BF7E-2DBCFE21E26A}" dt="2025-05-29T15:41:43.695" v="55" actId="1076"/>
-          <ac:graphicFrameMkLst>
-            <pc:docMk/>
-            <pc:sldMk cId="87713296" sldId="293"/>
-            <ac:graphicFrameMk id="4" creationId="{3D5E683C-B6F5-E7B9-E265-BEE2CA6C3343}"/>
-          </ac:graphicFrameMkLst>
-        </pc:graphicFrameChg>
-        <pc:graphicFrameChg chg="del">
-          <ac:chgData name="Quanming YAO" userId="4abab489-3045-406d-bbfe-969bcd5a84ea" providerId="ADAL" clId="{490D0536-0F69-4D83-BF7E-2DBCFE21E26A}" dt="2025-05-29T15:37:02.118" v="31" actId="478"/>
-          <ac:graphicFrameMkLst>
-            <pc:docMk/>
-            <pc:sldMk cId="87713296" sldId="293"/>
-            <ac:graphicFrameMk id="5" creationId="{6DC7611F-2194-837C-986E-5B7E04C0ED04}"/>
-          </ac:graphicFrameMkLst>
-        </pc:graphicFrameChg>
-        <pc:graphicFrameChg chg="mod modGraphic">
-          <ac:chgData name="Quanming YAO" userId="4abab489-3045-406d-bbfe-969bcd5a84ea" providerId="ADAL" clId="{490D0536-0F69-4D83-BF7E-2DBCFE21E26A}" dt="2025-05-29T15:46:44.794" v="255" actId="1036"/>
-          <ac:graphicFrameMkLst>
-            <pc:docMk/>
-            <pc:sldMk cId="87713296" sldId="293"/>
-            <ac:graphicFrameMk id="6" creationId="{8E82F0BF-249E-49A5-04A6-7E66B29F1F7F}"/>
-          </ac:graphicFrameMkLst>
-        </pc:graphicFrameChg>
-        <pc:picChg chg="del">
-          <ac:chgData name="Quanming YAO" userId="4abab489-3045-406d-bbfe-969bcd5a84ea" providerId="ADAL" clId="{490D0536-0F69-4D83-BF7E-2DBCFE21E26A}" dt="2025-05-29T15:41:45.926" v="56" actId="478"/>
-          <ac:picMkLst>
-            <pc:docMk/>
-            <pc:sldMk cId="87713296" sldId="293"/>
-            <ac:picMk id="10" creationId="{E908A6BA-F200-C3EB-E9E1-12CB20BEC9D6}"/>
-          </ac:picMkLst>
-        </pc:picChg>
-        <pc:picChg chg="add mod">
-          <ac:chgData name="Quanming YAO" userId="4abab489-3045-406d-bbfe-969bcd5a84ea" providerId="ADAL" clId="{490D0536-0F69-4D83-BF7E-2DBCFE21E26A}" dt="2025-05-29T15:46:13.969" v="217" actId="1035"/>
-          <ac:picMkLst>
-            <pc:docMk/>
-            <pc:sldMk cId="87713296" sldId="293"/>
-            <ac:picMk id="11" creationId="{9DDCAF54-7E94-820C-E273-9D664D1C72C5}"/>
-          </ac:picMkLst>
-        </pc:picChg>
-      </pc:sldChg>
-      <pc:sldChg chg="addSp delSp modSp mod">
-        <pc:chgData name="Quanming YAO" userId="4abab489-3045-406d-bbfe-969bcd5a84ea" providerId="ADAL" clId="{490D0536-0F69-4D83-BF7E-2DBCFE21E26A}" dt="2025-05-29T15:57:09.293" v="340"/>
-        <pc:sldMkLst>
-          <pc:docMk/>
-          <pc:sldMk cId="1044495451" sldId="299"/>
-        </pc:sldMkLst>
-        <pc:spChg chg="mod">
-          <ac:chgData name="Quanming YAO" userId="4abab489-3045-406d-bbfe-969bcd5a84ea" providerId="ADAL" clId="{490D0536-0F69-4D83-BF7E-2DBCFE21E26A}" dt="2025-05-29T15:57:09.293" v="340"/>
-          <ac:spMkLst>
-            <pc:docMk/>
-            <pc:sldMk cId="1044495451" sldId="299"/>
-            <ac:spMk id="3" creationId="{D4BB3791-A841-4746-AD10-23CF1CFBA39D}"/>
-          </ac:spMkLst>
-        </pc:spChg>
-        <pc:spChg chg="add del mod">
-          <ac:chgData name="Quanming YAO" userId="4abab489-3045-406d-bbfe-969bcd5a84ea" providerId="ADAL" clId="{490D0536-0F69-4D83-BF7E-2DBCFE21E26A}" dt="2025-05-29T15:56:37.491" v="312"/>
-          <ac:spMkLst>
-            <pc:docMk/>
-            <pc:sldMk cId="1044495451" sldId="299"/>
-            <ac:spMk id="8" creationId="{FE3438FA-8624-D55E-2116-B9FDA59F3E03}"/>
-          </ac:spMkLst>
-        </pc:spChg>
-      </pc:sldChg>
-      <pc:sldChg chg="modSp mod">
-        <pc:chgData name="Quanming YAO" userId="4abab489-3045-406d-bbfe-969bcd5a84ea" providerId="ADAL" clId="{490D0536-0F69-4D83-BF7E-2DBCFE21E26A}" dt="2025-05-29T15:28:37.222" v="24" actId="2710"/>
-        <pc:sldMkLst>
-          <pc:docMk/>
-          <pc:sldMk cId="522387290" sldId="324"/>
-        </pc:sldMkLst>
-        <pc:spChg chg="mod">
-          <ac:chgData name="Quanming YAO" userId="4abab489-3045-406d-bbfe-969bcd5a84ea" providerId="ADAL" clId="{490D0536-0F69-4D83-BF7E-2DBCFE21E26A}" dt="2025-05-29T15:25:09.881" v="23" actId="20577"/>
-          <ac:spMkLst>
-            <pc:docMk/>
-            <pc:sldMk cId="522387290" sldId="324"/>
-            <ac:spMk id="2" creationId="{CF03F44C-5551-8B60-732C-6BE84AFA8186}"/>
-          </ac:spMkLst>
-        </pc:spChg>
-        <pc:spChg chg="mod">
-          <ac:chgData name="Quanming YAO" userId="4abab489-3045-406d-bbfe-969bcd5a84ea" providerId="ADAL" clId="{490D0536-0F69-4D83-BF7E-2DBCFE21E26A}" dt="2025-05-29T15:28:37.222" v="24" actId="2710"/>
-          <ac:spMkLst>
-            <pc:docMk/>
-            <pc:sldMk cId="522387290" sldId="324"/>
-            <ac:spMk id="3" creationId="{6D3B4C24-0C8F-A2A6-7D5B-3851CDE0C7C8}"/>
-          </ac:spMkLst>
-        </pc:spChg>
-      </pc:sldChg>
-      <pc:sldChg chg="add">
-        <pc:chgData name="Quanming YAO" userId="4abab489-3045-406d-bbfe-969bcd5a84ea" providerId="ADAL" clId="{490D0536-0F69-4D83-BF7E-2DBCFE21E26A}" dt="2025-05-29T15:58:15.271" v="343"/>
-        <pc:sldMkLst>
-          <pc:docMk/>
-          <pc:sldMk cId="1619266105" sldId="15108"/>
-        </pc:sldMkLst>
-      </pc:sldChg>
-      <pc:sldChg chg="del mod modShow">
-        <pc:chgData name="Quanming YAO" userId="4abab489-3045-406d-bbfe-969bcd5a84ea" providerId="ADAL" clId="{490D0536-0F69-4D83-BF7E-2DBCFE21E26A}" dt="2025-05-29T15:58:11.837" v="342" actId="2696"/>
-        <pc:sldMkLst>
-          <pc:docMk/>
-          <pc:sldMk cId="3733750239" sldId="15108"/>
-        </pc:sldMkLst>
-      </pc:sldChg>
-      <pc:sldChg chg="modSp mod">
-        <pc:chgData name="Quanming YAO" userId="4abab489-3045-406d-bbfe-969bcd5a84ea" providerId="ADAL" clId="{490D0536-0F69-4D83-BF7E-2DBCFE21E26A}" dt="2025-05-29T15:24:05.470" v="11" actId="1076"/>
-        <pc:sldMkLst>
-          <pc:docMk/>
-          <pc:sldMk cId="4188840687" sldId="15129"/>
-        </pc:sldMkLst>
-        <pc:picChg chg="mod">
-          <ac:chgData name="Quanming YAO" userId="4abab489-3045-406d-bbfe-969bcd5a84ea" providerId="ADAL" clId="{490D0536-0F69-4D83-BF7E-2DBCFE21E26A}" dt="2025-05-29T15:24:05.470" v="11" actId="1076"/>
-          <ac:picMkLst>
-            <pc:docMk/>
-            <pc:sldMk cId="4188840687" sldId="15129"/>
-            <ac:picMk id="3" creationId="{722487C3-C4FC-AE8C-712F-A8E392338124}"/>
-          </ac:picMkLst>
-        </pc:picChg>
-      </pc:sldChg>
-      <pc:sldChg chg="modSp mod">
-        <pc:chgData name="Quanming YAO" userId="4abab489-3045-406d-bbfe-969bcd5a84ea" providerId="ADAL" clId="{490D0536-0F69-4D83-BF7E-2DBCFE21E26A}" dt="2025-05-29T15:24:37.470" v="13" actId="14100"/>
-        <pc:sldMkLst>
-          <pc:docMk/>
-          <pc:sldMk cId="2831709334" sldId="15130"/>
-        </pc:sldMkLst>
-        <pc:spChg chg="mod">
-          <ac:chgData name="Quanming YAO" userId="4abab489-3045-406d-bbfe-969bcd5a84ea" providerId="ADAL" clId="{490D0536-0F69-4D83-BF7E-2DBCFE21E26A}" dt="2025-05-29T15:24:37.470" v="13" actId="14100"/>
-          <ac:spMkLst>
-            <pc:docMk/>
-            <pc:sldMk cId="2831709334" sldId="15130"/>
-            <ac:spMk id="5" creationId="{7C0E8AC8-6D1B-D5AE-A293-C75740326385}"/>
-          </ac:spMkLst>
-        </pc:spChg>
-      </pc:sldChg>
-      <pc:sldChg chg="del mod modShow">
-        <pc:chgData name="Quanming YAO" userId="4abab489-3045-406d-bbfe-969bcd5a84ea" providerId="ADAL" clId="{490D0536-0F69-4D83-BF7E-2DBCFE21E26A}" dt="2025-05-29T15:58:11.837" v="342" actId="2696"/>
-        <pc:sldMkLst>
-          <pc:docMk/>
-          <pc:sldMk cId="3322191203" sldId="15132"/>
-        </pc:sldMkLst>
-      </pc:sldChg>
-      <pc:sldChg chg="add">
-        <pc:chgData name="Quanming YAO" userId="4abab489-3045-406d-bbfe-969bcd5a84ea" providerId="ADAL" clId="{490D0536-0F69-4D83-BF7E-2DBCFE21E26A}" dt="2025-05-29T15:58:15.271" v="343"/>
-        <pc:sldMkLst>
-          <pc:docMk/>
-          <pc:sldMk cId="4282272927" sldId="15132"/>
-        </pc:sldMkLst>
-      </pc:sldChg>
-      <pc:sldChg chg="addSp modSp mod">
-        <pc:chgData name="Quanming YAO" userId="4abab489-3045-406d-bbfe-969bcd5a84ea" providerId="ADAL" clId="{490D0536-0F69-4D83-BF7E-2DBCFE21E26A}" dt="2025-05-29T15:55:36.280" v="296" actId="1076"/>
-        <pc:sldMkLst>
-          <pc:docMk/>
-          <pc:sldMk cId="3410606368" sldId="15148"/>
-        </pc:sldMkLst>
-        <pc:spChg chg="mod">
-          <ac:chgData name="Quanming YAO" userId="4abab489-3045-406d-bbfe-969bcd5a84ea" providerId="ADAL" clId="{490D0536-0F69-4D83-BF7E-2DBCFE21E26A}" dt="2025-05-29T15:55:32.792" v="295" actId="164"/>
-          <ac:spMkLst>
-            <pc:docMk/>
-            <pc:sldMk cId="3410606368" sldId="15148"/>
-            <ac:spMk id="3" creationId="{D32E42AE-ED95-46CC-7240-1922EEC07BA3}"/>
-          </ac:spMkLst>
-        </pc:spChg>
-        <pc:spChg chg="mod">
-          <ac:chgData name="Quanming YAO" userId="4abab489-3045-406d-bbfe-969bcd5a84ea" providerId="ADAL" clId="{490D0536-0F69-4D83-BF7E-2DBCFE21E26A}" dt="2025-05-29T15:55:32.792" v="295" actId="164"/>
-          <ac:spMkLst>
-            <pc:docMk/>
-            <pc:sldMk cId="3410606368" sldId="15148"/>
-            <ac:spMk id="5" creationId="{664BE9C5-B8A5-650D-23C3-C89FABC50A10}"/>
-          </ac:spMkLst>
-        </pc:spChg>
-        <pc:spChg chg="mod">
-          <ac:chgData name="Quanming YAO" userId="4abab489-3045-406d-bbfe-969bcd5a84ea" providerId="ADAL" clId="{490D0536-0F69-4D83-BF7E-2DBCFE21E26A}" dt="2025-05-29T15:55:32.792" v="295" actId="164"/>
-          <ac:spMkLst>
-            <pc:docMk/>
-            <pc:sldMk cId="3410606368" sldId="15148"/>
-            <ac:spMk id="7" creationId="{97865CF5-0D45-60E2-FD57-AA305CD526BD}"/>
-          </ac:spMkLst>
-        </pc:spChg>
-        <pc:spChg chg="mod">
-          <ac:chgData name="Quanming YAO" userId="4abab489-3045-406d-bbfe-969bcd5a84ea" providerId="ADAL" clId="{490D0536-0F69-4D83-BF7E-2DBCFE21E26A}" dt="2025-05-29T15:55:32.792" v="295" actId="164"/>
-          <ac:spMkLst>
-            <pc:docMk/>
-            <pc:sldMk cId="3410606368" sldId="15148"/>
-            <ac:spMk id="10" creationId="{4B7C09E6-CCE1-6E43-9868-AAF8BD917395}"/>
-          </ac:spMkLst>
-        </pc:spChg>
-        <pc:spChg chg="mod">
-          <ac:chgData name="Quanming YAO" userId="4abab489-3045-406d-bbfe-969bcd5a84ea" providerId="ADAL" clId="{490D0536-0F69-4D83-BF7E-2DBCFE21E26A}" dt="2025-05-29T15:55:32.792" v="295" actId="164"/>
-          <ac:spMkLst>
-            <pc:docMk/>
-            <pc:sldMk cId="3410606368" sldId="15148"/>
-            <ac:spMk id="11" creationId="{E3EC126E-3A51-D91D-CE95-013D9DCF0D73}"/>
-          </ac:spMkLst>
-        </pc:spChg>
-        <pc:spChg chg="mod">
-          <ac:chgData name="Quanming YAO" userId="4abab489-3045-406d-bbfe-969bcd5a84ea" providerId="ADAL" clId="{490D0536-0F69-4D83-BF7E-2DBCFE21E26A}" dt="2025-05-29T15:55:32.792" v="295" actId="164"/>
-          <ac:spMkLst>
-            <pc:docMk/>
-            <pc:sldMk cId="3410606368" sldId="15148"/>
-            <ac:spMk id="12" creationId="{A06423E6-5BE8-9EB5-3AD7-14CD87BBABD2}"/>
-          </ac:spMkLst>
-        </pc:spChg>
-        <pc:spChg chg="mod">
-          <ac:chgData name="Quanming YAO" userId="4abab489-3045-406d-bbfe-969bcd5a84ea" providerId="ADAL" clId="{490D0536-0F69-4D83-BF7E-2DBCFE21E26A}" dt="2025-05-29T15:55:32.792" v="295" actId="164"/>
-          <ac:spMkLst>
-            <pc:docMk/>
-            <pc:sldMk cId="3410606368" sldId="15148"/>
-            <ac:spMk id="14" creationId="{F2ACFF0D-2D7C-2EDC-9E03-897E5ED3CCC0}"/>
-          </ac:spMkLst>
-        </pc:spChg>
-        <pc:spChg chg="mod">
-          <ac:chgData name="Quanming YAO" userId="4abab489-3045-406d-bbfe-969bcd5a84ea" providerId="ADAL" clId="{490D0536-0F69-4D83-BF7E-2DBCFE21E26A}" dt="2025-05-29T15:55:32.792" v="295" actId="164"/>
-          <ac:spMkLst>
-            <pc:docMk/>
-            <pc:sldMk cId="3410606368" sldId="15148"/>
-            <ac:spMk id="19" creationId="{D76C2F37-174F-35A9-3823-C860147B9555}"/>
-          </ac:spMkLst>
-        </pc:spChg>
-        <pc:spChg chg="mod">
-          <ac:chgData name="Quanming YAO" userId="4abab489-3045-406d-bbfe-969bcd5a84ea" providerId="ADAL" clId="{490D0536-0F69-4D83-BF7E-2DBCFE21E26A}" dt="2025-05-29T15:50:27.829" v="257" actId="20577"/>
-          <ac:spMkLst>
-            <pc:docMk/>
-            <pc:sldMk cId="3410606368" sldId="15148"/>
-            <ac:spMk id="20" creationId="{C7408384-0C88-8117-2064-054B607900EC}"/>
-          </ac:spMkLst>
-        </pc:spChg>
-        <pc:spChg chg="mod">
-          <ac:chgData name="Quanming YAO" userId="4abab489-3045-406d-bbfe-969bcd5a84ea" providerId="ADAL" clId="{490D0536-0F69-4D83-BF7E-2DBCFE21E26A}" dt="2025-05-29T15:55:32.792" v="295" actId="164"/>
-          <ac:spMkLst>
-            <pc:docMk/>
-            <pc:sldMk cId="3410606368" sldId="15148"/>
-            <ac:spMk id="25" creationId="{74FF5233-9CF3-4761-2F89-59011BEE4CAA}"/>
-          </ac:spMkLst>
-        </pc:spChg>
-        <pc:spChg chg="mod">
-          <ac:chgData name="Quanming YAO" userId="4abab489-3045-406d-bbfe-969bcd5a84ea" providerId="ADAL" clId="{490D0536-0F69-4D83-BF7E-2DBCFE21E26A}" dt="2025-05-29T15:55:32.792" v="295" actId="164"/>
-          <ac:spMkLst>
-            <pc:docMk/>
-            <pc:sldMk cId="3410606368" sldId="15148"/>
-            <ac:spMk id="40" creationId="{50C20878-5B20-8494-B0E8-BC6B434A6279}"/>
-          </ac:spMkLst>
-        </pc:spChg>
-        <pc:grpChg chg="mod">
-          <ac:chgData name="Quanming YAO" userId="4abab489-3045-406d-bbfe-969bcd5a84ea" providerId="ADAL" clId="{490D0536-0F69-4D83-BF7E-2DBCFE21E26A}" dt="2025-05-29T15:55:36.280" v="296" actId="1076"/>
-          <ac:grpSpMkLst>
-            <pc:docMk/>
-            <pc:sldMk cId="3410606368" sldId="15148"/>
-            <ac:grpSpMk id="2" creationId="{3342A21F-8779-DBD3-E1B1-AF1702052166}"/>
-          </ac:grpSpMkLst>
-        </pc:grpChg>
-      </pc:sldChg>
-      <pc:sldChg chg="modSp mod">
-        <pc:chgData name="Quanming YAO" userId="4abab489-3045-406d-bbfe-969bcd5a84ea" providerId="ADAL" clId="{490D0536-0F69-4D83-BF7E-2DBCFE21E26A}" dt="2025-05-29T15:29:27.841" v="29" actId="400"/>
-        <pc:sldMkLst>
-          <pc:docMk/>
-          <pc:sldMk cId="260882613" sldId="15149"/>
-        </pc:sldMkLst>
-        <pc:spChg chg="mod">
-          <ac:chgData name="Quanming YAO" userId="4abab489-3045-406d-bbfe-969bcd5a84ea" providerId="ADAL" clId="{490D0536-0F69-4D83-BF7E-2DBCFE21E26A}" dt="2025-05-29T15:29:03.037" v="27" actId="20577"/>
-          <ac:spMkLst>
-            <pc:docMk/>
-            <pc:sldMk cId="260882613" sldId="15149"/>
-            <ac:spMk id="2" creationId="{F96807BF-4819-BE86-953B-E5A796BD3819}"/>
-          </ac:spMkLst>
-        </pc:spChg>
-        <pc:spChg chg="mod">
-          <ac:chgData name="Quanming YAO" userId="4abab489-3045-406d-bbfe-969bcd5a84ea" providerId="ADAL" clId="{490D0536-0F69-4D83-BF7E-2DBCFE21E26A}" dt="2025-05-29T15:29:27.841" v="29" actId="400"/>
-          <ac:spMkLst>
-            <pc:docMk/>
-            <pc:sldMk cId="260882613" sldId="15149"/>
-            <ac:spMk id="3" creationId="{86A3362E-3845-53AC-9378-3E36B92E7095}"/>
-          </ac:spMkLst>
-        </pc:spChg>
-      </pc:sldChg>
-    </pc:docChg>
-  </pc:docChgLst>
-</pc:chgInfo>
-</file>
-
 <file path=ppt/notesMasters/notesMaster1.xml><?xml version="1.0" encoding="utf-8"?>
 <p:notesMaster xmlns:a="http://schemas.openxmlformats.org/drawingml/2006/main" xmlns:r="http://schemas.openxmlformats.org/officeDocument/2006/relationships" xmlns:p="http://schemas.openxmlformats.org/presentationml/2006/main">
   <p:cSld>
@@ -565,7 +227,7 @@
             <a:fld id="{EA150398-E1AF-4D77-8F78-0CD8FEA1D927}" type="datetimeFigureOut">
               <a:rPr lang="zh-CN" altLang="en-US" smtClean="0"/>
               <a:pPr/>
-              <a:t>2025/9/14</a:t>
+              <a:t>2026/5/8</a:t>
             </a:fld>
             <a:endParaRPr lang="zh-CN" altLang="en-US" dirty="0"/>
           </a:p>
@@ -970,7 +632,7 @@
           <a:p>
             <a:fld id="{673AA367-CA97-4E97-B084-89A42CD3C83A}" type="datetime1">
               <a:rPr lang="zh-CN" altLang="en-US" smtClean="0"/>
-              <a:t>2025/9/14</a:t>
+              <a:t>2026/5/8</a:t>
             </a:fld>
             <a:endParaRPr lang="zh-CN" altLang="en-US"/>
           </a:p>
@@ -1140,7 +802,7 @@
           <a:p>
             <a:fld id="{6DFF14D8-E9FB-484E-941B-BA88BCFE5806}" type="datetime1">
               <a:rPr lang="zh-CN" altLang="en-US" smtClean="0"/>
-              <a:t>2025/9/14</a:t>
+              <a:t>2026/5/8</a:t>
             </a:fld>
             <a:endParaRPr lang="zh-CN" altLang="en-US"/>
           </a:p>
@@ -1320,7 +982,7 @@
           <a:p>
             <a:fld id="{414A88B3-F6DA-4E95-A32A-994ADFFB3921}" type="datetime1">
               <a:rPr lang="zh-CN" altLang="en-US" smtClean="0"/>
-              <a:t>2025/9/14</a:t>
+              <a:t>2026/5/8</a:t>
             </a:fld>
             <a:endParaRPr lang="zh-CN" altLang="en-US"/>
           </a:p>
@@ -1490,7 +1152,7 @@
           <a:p>
             <a:fld id="{A8BD699C-BC1A-48FD-99CC-6F7930D10C81}" type="datetime1">
               <a:rPr lang="zh-CN" altLang="en-US" smtClean="0"/>
-              <a:t>2025/9/14</a:t>
+              <a:t>2026/5/8</a:t>
             </a:fld>
             <a:endParaRPr lang="zh-CN" altLang="en-US"/>
           </a:p>
@@ -1734,7 +1396,7 @@
           <a:p>
             <a:fld id="{855AD122-DD4F-4BD4-AF8B-4AE5880186B9}" type="datetime1">
               <a:rPr lang="zh-CN" altLang="en-US" smtClean="0"/>
-              <a:t>2025/9/14</a:t>
+              <a:t>2026/5/8</a:t>
             </a:fld>
             <a:endParaRPr lang="zh-CN" altLang="en-US"/>
           </a:p>
@@ -1966,7 +1628,7 @@
           <a:p>
             <a:fld id="{4DCE1EC2-FACA-4535-8493-7ED5444D1A5B}" type="datetime1">
               <a:rPr lang="zh-CN" altLang="en-US" smtClean="0"/>
-              <a:t>2025/9/14</a:t>
+              <a:t>2026/5/8</a:t>
             </a:fld>
             <a:endParaRPr lang="zh-CN" altLang="en-US"/>
           </a:p>
@@ -2333,7 +1995,7 @@
           <a:p>
             <a:fld id="{4BB17ABC-CE7C-436E-821F-3E99B003B208}" type="datetime1">
               <a:rPr lang="zh-CN" altLang="en-US" smtClean="0"/>
-              <a:t>2025/9/14</a:t>
+              <a:t>2026/5/8</a:t>
             </a:fld>
             <a:endParaRPr lang="zh-CN" altLang="en-US"/>
           </a:p>
@@ -2451,7 +2113,7 @@
           <a:p>
             <a:fld id="{3366BFCE-5C22-4CA9-9BE3-BB16111B0556}" type="datetime1">
               <a:rPr lang="zh-CN" altLang="en-US" smtClean="0"/>
-              <a:t>2025/9/14</a:t>
+              <a:t>2026/5/8</a:t>
             </a:fld>
             <a:endParaRPr lang="zh-CN" altLang="en-US"/>
           </a:p>
@@ -2546,7 +2208,7 @@
           <a:p>
             <a:fld id="{DD8E9B35-0095-4218-80B9-5E37C46FD9EC}" type="datetime1">
               <a:rPr lang="zh-CN" altLang="en-US" smtClean="0"/>
-              <a:t>2025/9/14</a:t>
+              <a:t>2026/5/8</a:t>
             </a:fld>
             <a:endParaRPr lang="zh-CN" altLang="en-US"/>
           </a:p>
@@ -2823,7 +2485,7 @@
           <a:p>
             <a:fld id="{342B77B1-B8F7-4865-9062-61F61CC1BA93}" type="datetime1">
               <a:rPr lang="zh-CN" altLang="en-US" smtClean="0"/>
-              <a:t>2025/9/14</a:t>
+              <a:t>2026/5/8</a:t>
             </a:fld>
             <a:endParaRPr lang="zh-CN" altLang="en-US"/>
           </a:p>
@@ -3080,7 +2742,7 @@
           <a:p>
             <a:fld id="{55F43856-78E6-49D1-BA7C-A29373CA4EA7}" type="datetime1">
               <a:rPr lang="zh-CN" altLang="en-US" smtClean="0"/>
-              <a:t>2025/9/14</a:t>
+              <a:t>2026/5/8</a:t>
             </a:fld>
             <a:endParaRPr lang="zh-CN" altLang="en-US"/>
           </a:p>
@@ -3295,7 +2957,7 @@
             <a:fld id="{5E6F3B06-10B6-48F4-BFC0-6F1349DF7648}" type="datetime1">
               <a:rPr lang="zh-CN" altLang="en-US" smtClean="0"/>
               <a:pPr/>
-              <a:t>2025/9/14</a:t>
+              <a:t>2026/5/8</a:t>
             </a:fld>
             <a:endParaRPr lang="zh-CN" altLang="en-US" dirty="0"/>
           </a:p>
